--- a/test-corpus/word-verification/radar.pptx
+++ b/test-corpus/word-verification/radar.pptx
@@ -144,8 +144,8 @@
         </p:nvSpPr>
         <p:spPr>
           <a:xfrm>
-            <a:off x="2178844" y="1171142"/>
-            <a:ext cx="6104659" cy="406977"/>
+            <a:off x="457200" y="1430729"/>
+            <a:ext cx="5481650" cy="365443"/>
           </a:xfrm>
           <a:prstGeom prst="rect">
             <a:avLst/>
@@ -168,7 +168,7 @@
               </a:spcAft>
             </a:pPr>
             <a:r>
-              <a:rPr lang="en-US" b="1" sz="1175" dirty="0">
+              <a:rPr lang="en-US" b="1" sz="1050" dirty="0">
                 <a:solidFill>
                   <a:srgbClr val="000000"/>
                 </a:solidFill>
@@ -186,8 +186,8 @@
         </p:nvSpPr>
         <p:spPr>
           <a:xfrm>
-            <a:off x="4812636" y="3577396"/>
-            <a:ext cx="837074" cy="966571"/>
+            <a:off x="2822201" y="3591413"/>
+            <a:ext cx="751648" cy="867928"/>
           </a:xfrm>
           <a:custGeom>
             <a:avLst/>
@@ -196,31 +196,31 @@
             <a:cxnLst/>
             <a:rect l="0" t="0" r="0" b="0"/>
             <a:pathLst>
-              <a:path w="783644" h="904875">
+              <a:path w="751648" h="867928">
                 <a:moveTo>
-                  <a:pt x="391822" y="0"/>
+                  <a:pt x="375824" y="0"/>
                 </a:moveTo>
                 <a:lnTo>
-                  <a:pt x="783644" y="226218"/>
-                </a:lnTo>
-                <a:lnTo>
-                  <a:pt x="783644" y="678656"/>
-                </a:lnTo>
-                <a:lnTo>
-                  <a:pt x="391822" y="904875"/>
-                </a:lnTo>
-                <a:lnTo>
-                  <a:pt x="0" y="678656"/>
-                </a:lnTo>
-                <a:lnTo>
-                  <a:pt x="0" y="226218"/>
+                  <a:pt x="751648" y="216982"/>
+                </a:lnTo>
+                <a:lnTo>
+                  <a:pt x="751648" y="650946"/>
+                </a:lnTo>
+                <a:lnTo>
+                  <a:pt x="375824" y="867928"/>
+                </a:lnTo>
+                <a:lnTo>
+                  <a:pt x="0" y="650946"/>
+                </a:lnTo>
+                <a:lnTo>
+                  <a:pt x="0" y="216982"/>
                 </a:lnTo>
                 <a:close/>
               </a:path>
             </a:pathLst>
           </a:custGeom>
           <a:noFill/>
-          <a:ln w="10174">
+          <a:ln w="9136">
             <a:solidFill>
               <a:srgbClr val="BFBFBF"/>
             </a:solidFill>
@@ -235,8 +235,8 @@
         </p:nvSpPr>
         <p:spPr>
           <a:xfrm>
-            <a:off x="4394098" y="3094110"/>
-            <a:ext cx="1674151" cy="1933142"/>
+            <a:off x="2446377" y="3157449"/>
+            <a:ext cx="1503296" cy="1735856"/>
           </a:xfrm>
           <a:custGeom>
             <a:avLst/>
@@ -245,31 +245,31 @@
             <a:cxnLst/>
             <a:rect l="0" t="0" r="0" b="0"/>
             <a:pathLst>
-              <a:path w="1567290" h="1809750">
+              <a:path w="1503296" h="1735856">
                 <a:moveTo>
-                  <a:pt x="783645" y="0"/>
+                  <a:pt x="751648" y="0"/>
                 </a:moveTo>
                 <a:lnTo>
-                  <a:pt x="1567290" y="452438"/>
-                </a:lnTo>
-                <a:lnTo>
-                  <a:pt x="1567290" y="1357313"/>
-                </a:lnTo>
-                <a:lnTo>
-                  <a:pt x="783645" y="1809750"/>
-                </a:lnTo>
-                <a:lnTo>
-                  <a:pt x="0" y="1357313"/>
-                </a:lnTo>
-                <a:lnTo>
-                  <a:pt x="0" y="452438"/>
+                  <a:pt x="1503296" y="433964"/>
+                </a:lnTo>
+                <a:lnTo>
+                  <a:pt x="1503296" y="1301892"/>
+                </a:lnTo>
+                <a:lnTo>
+                  <a:pt x="751648" y="1735856"/>
+                </a:lnTo>
+                <a:lnTo>
+                  <a:pt x="0" y="1301892"/>
+                </a:lnTo>
+                <a:lnTo>
+                  <a:pt x="0" y="433964"/>
                 </a:lnTo>
                 <a:close/>
               </a:path>
             </a:pathLst>
           </a:custGeom>
           <a:noFill/>
-          <a:ln w="10174">
+          <a:ln w="9136">
             <a:solidFill>
               <a:srgbClr val="BFBFBF"/>
             </a:solidFill>
@@ -284,8 +284,8 @@
         </p:nvSpPr>
         <p:spPr>
           <a:xfrm>
-            <a:off x="3975561" y="2610825"/>
-            <a:ext cx="2511225" cy="2899713"/>
+            <a:off x="2070554" y="2723485"/>
+            <a:ext cx="2254942" cy="2603784"/>
           </a:xfrm>
           <a:custGeom>
             <a:avLst/>
@@ -294,31 +294,31 @@
             <a:cxnLst/>
             <a:rect l="0" t="0" r="0" b="0"/>
             <a:pathLst>
-              <a:path w="2350934" h="2714625">
+              <a:path w="2254942" h="2603784">
                 <a:moveTo>
-                  <a:pt x="1175467" y="0"/>
+                  <a:pt x="1127471" y="0"/>
                 </a:moveTo>
                 <a:lnTo>
-                  <a:pt x="2350934" y="678656"/>
-                </a:lnTo>
-                <a:lnTo>
-                  <a:pt x="2350934" y="2035968"/>
-                </a:lnTo>
-                <a:lnTo>
-                  <a:pt x="1175467" y="2714625"/>
-                </a:lnTo>
-                <a:lnTo>
-                  <a:pt x="0" y="2035968"/>
-                </a:lnTo>
-                <a:lnTo>
-                  <a:pt x="0" y="678656"/>
+                  <a:pt x="2254942" y="650946"/>
+                </a:lnTo>
+                <a:lnTo>
+                  <a:pt x="2254942" y="1952838"/>
+                </a:lnTo>
+                <a:lnTo>
+                  <a:pt x="1127471" y="2603784"/>
+                </a:lnTo>
+                <a:lnTo>
+                  <a:pt x="0" y="1952838"/>
+                </a:lnTo>
+                <a:lnTo>
+                  <a:pt x="0" y="650946"/>
                 </a:lnTo>
                 <a:close/>
               </a:path>
             </a:pathLst>
           </a:custGeom>
           <a:noFill/>
-          <a:ln w="10174">
+          <a:ln w="9136">
             <a:solidFill>
               <a:srgbClr val="BFBFBF"/>
             </a:solidFill>
@@ -333,8 +333,8 @@
         </p:nvSpPr>
         <p:spPr>
           <a:xfrm>
-            <a:off x="3557024" y="2127539"/>
-            <a:ext cx="3348299" cy="3866284"/>
+            <a:off x="1694730" y="2289521"/>
+            <a:ext cx="3006590" cy="3471712"/>
           </a:xfrm>
           <a:custGeom>
             <a:avLst/>
@@ -343,31 +343,31 @@
             <a:cxnLst/>
             <a:rect l="0" t="0" r="0" b="0"/>
             <a:pathLst>
-              <a:path w="3134578" h="3619500">
+              <a:path w="3006590" h="3471712">
                 <a:moveTo>
-                  <a:pt x="1567289" y="0"/>
+                  <a:pt x="1503295" y="0"/>
                 </a:moveTo>
                 <a:lnTo>
-                  <a:pt x="3134578" y="904875"/>
-                </a:lnTo>
-                <a:lnTo>
-                  <a:pt x="3134578" y="2714625"/>
-                </a:lnTo>
-                <a:lnTo>
-                  <a:pt x="1567289" y="3619500"/>
-                </a:lnTo>
-                <a:lnTo>
-                  <a:pt x="0" y="2714625"/>
-                </a:lnTo>
-                <a:lnTo>
-                  <a:pt x="0" y="904875"/>
+                  <a:pt x="3006590" y="867928"/>
+                </a:lnTo>
+                <a:lnTo>
+                  <a:pt x="3006590" y="2603784"/>
+                </a:lnTo>
+                <a:lnTo>
+                  <a:pt x="1503295" y="3471712"/>
+                </a:lnTo>
+                <a:lnTo>
+                  <a:pt x="0" y="2603784"/>
+                </a:lnTo>
+                <a:lnTo>
+                  <a:pt x="0" y="867928"/>
                 </a:lnTo>
                 <a:close/>
               </a:path>
             </a:pathLst>
           </a:custGeom>
           <a:noFill/>
-          <a:ln w="10174">
+          <a:ln w="9136">
             <a:solidFill>
               <a:srgbClr val="BFBFBF"/>
             </a:solidFill>
@@ -382,8 +382,8 @@
         </p:nvSpPr>
         <p:spPr>
           <a:xfrm>
-            <a:off x="5231173" y="2127539"/>
-            <a:ext cx="1" cy="1933142"/>
+            <a:off x="3198025" y="2289521"/>
+            <a:ext cx="1" cy="1735856"/>
           </a:xfrm>
           <a:custGeom>
             <a:avLst/>
@@ -392,9 +392,9 @@
             <a:cxnLst/>
             <a:rect l="0" t="0" r="0" b="0"/>
             <a:pathLst>
-              <a:path w="1" h="1809750" fill="none">
+              <a:path w="1" h="1735856" fill="none">
                 <a:moveTo>
-                  <a:pt x="0" y="1809750"/>
+                  <a:pt x="0" y="1735856"/>
                 </a:moveTo>
                 <a:lnTo>
                   <a:pt x="0" y="0"/>
@@ -403,7 +403,7 @@
             </a:pathLst>
           </a:custGeom>
           <a:noFill/>
-          <a:ln w="10174">
+          <a:ln w="9136">
             <a:solidFill>
               <a:srgbClr val="7F7F7F"/>
             </a:solidFill>
@@ -418,8 +418,8 @@
         </p:nvSpPr>
         <p:spPr>
           <a:xfrm>
-            <a:off x="5002249" y="1842655"/>
-            <a:ext cx="457849" cy="203489"/>
+            <a:off x="2992463" y="2033711"/>
+            <a:ext cx="411124" cy="182722"/>
           </a:xfrm>
           <a:prstGeom prst="rect">
             <a:avLst/>
@@ -442,7 +442,7 @@
               </a:spcAft>
             </a:pPr>
             <a:r>
-              <a:rPr lang="en-US" sz="1175" dirty="0">
+              <a:rPr lang="en-US" sz="1050" dirty="0">
                 <a:solidFill>
                   <a:srgbClr val="000000"/>
                 </a:solidFill>
@@ -460,8 +460,8 @@
         </p:nvSpPr>
         <p:spPr>
           <a:xfrm>
-            <a:off x="5231173" y="3094110"/>
-            <a:ext cx="1674150" cy="966571"/>
+            <a:off x="3198025" y="3157449"/>
+            <a:ext cx="1503295" cy="867928"/>
           </a:xfrm>
           <a:custGeom>
             <a:avLst/>
@@ -470,18 +470,18 @@
             <a:cxnLst/>
             <a:rect l="0" t="0" r="0" b="0"/>
             <a:pathLst>
-              <a:path w="1567289" h="904875" fill="none">
+              <a:path w="1503295" h="867928" fill="none">
                 <a:moveTo>
-                  <a:pt x="0" y="904875"/>
+                  <a:pt x="0" y="867928"/>
                 </a:moveTo>
                 <a:lnTo>
-                  <a:pt x="1567289" y="0"/>
+                  <a:pt x="1503295" y="0"/>
                 </a:lnTo>
               </a:path>
             </a:pathLst>
           </a:custGeom>
           <a:noFill/>
-          <a:ln w="10174">
+          <a:ln w="9136">
             <a:solidFill>
               <a:srgbClr val="7F7F7F"/>
             </a:solidFill>
@@ -496,8 +496,8 @@
         </p:nvSpPr>
         <p:spPr>
           <a:xfrm>
-            <a:off x="6947091" y="2900795"/>
-            <a:ext cx="691861" cy="203489"/>
+            <a:off x="4738825" y="2983863"/>
+            <a:ext cx="621254" cy="182722"/>
           </a:xfrm>
           <a:prstGeom prst="rect">
             <a:avLst/>
@@ -520,7 +520,7 @@
               </a:spcAft>
             </a:pPr>
             <a:r>
-              <a:rPr lang="en-US" sz="1175" dirty="0">
+              <a:rPr lang="en-US" sz="1050" dirty="0">
                 <a:solidFill>
                   <a:srgbClr val="000000"/>
                 </a:solidFill>
@@ -538,8 +538,8 @@
         </p:nvSpPr>
         <p:spPr>
           <a:xfrm>
-            <a:off x="5231173" y="4060681"/>
-            <a:ext cx="1674150" cy="966571"/>
+            <a:off x="3198025" y="4025377"/>
+            <a:ext cx="1503295" cy="867928"/>
           </a:xfrm>
           <a:custGeom>
             <a:avLst/>
@@ -548,18 +548,18 @@
             <a:cxnLst/>
             <a:rect l="0" t="0" r="0" b="0"/>
             <a:pathLst>
-              <a:path w="1567289" h="904875" fill="none">
+              <a:path w="1503295" h="867928" fill="none">
                 <a:moveTo>
                   <a:pt x="0" y="0"/>
                 </a:moveTo>
                 <a:lnTo>
-                  <a:pt x="1567289" y="904875"/>
+                  <a:pt x="1503295" y="867928"/>
                 </a:lnTo>
               </a:path>
             </a:pathLst>
           </a:custGeom>
           <a:noFill/>
-          <a:ln w="10174">
+          <a:ln w="9136">
             <a:solidFill>
               <a:srgbClr val="7F7F7F"/>
             </a:solidFill>
@@ -574,8 +574,8 @@
         </p:nvSpPr>
         <p:spPr>
           <a:xfrm>
-            <a:off x="6947091" y="5017077"/>
-            <a:ext cx="691861" cy="203489"/>
+            <a:off x="4738825" y="4884169"/>
+            <a:ext cx="621254" cy="182722"/>
           </a:xfrm>
           <a:prstGeom prst="rect">
             <a:avLst/>
@@ -598,7 +598,7 @@
               </a:spcAft>
             </a:pPr>
             <a:r>
-              <a:rPr lang="en-US" sz="1175" dirty="0">
+              <a:rPr lang="en-US" sz="1050" dirty="0">
                 <a:solidFill>
                   <a:srgbClr val="000000"/>
                 </a:solidFill>
@@ -616,8 +616,8 @@
         </p:nvSpPr>
         <p:spPr>
           <a:xfrm>
-            <a:off x="5231173" y="4060681"/>
-            <a:ext cx="1" cy="1933142"/>
+            <a:off x="3198025" y="4025377"/>
+            <a:ext cx="1" cy="1735856"/>
           </a:xfrm>
           <a:custGeom>
             <a:avLst/>
@@ -626,18 +626,18 @@
             <a:cxnLst/>
             <a:rect l="0" t="0" r="0" b="0"/>
             <a:pathLst>
-              <a:path w="1" h="1809750" fill="none">
+              <a:path w="1" h="1735856" fill="none">
                 <a:moveTo>
                   <a:pt x="0" y="0"/>
                 </a:moveTo>
                 <a:lnTo>
-                  <a:pt x="0" y="1809750"/>
+                  <a:pt x="0" y="1735856"/>
                 </a:lnTo>
               </a:path>
             </a:pathLst>
           </a:custGeom>
           <a:noFill/>
-          <a:ln w="10174">
+          <a:ln w="9136">
             <a:solidFill>
               <a:srgbClr val="7F7F7F"/>
             </a:solidFill>
@@ -652,8 +652,8 @@
         </p:nvSpPr>
         <p:spPr>
           <a:xfrm>
-            <a:off x="4885243" y="6075218"/>
-            <a:ext cx="691861" cy="203489"/>
+            <a:off x="2887398" y="5834321"/>
+            <a:ext cx="621254" cy="182722"/>
           </a:xfrm>
           <a:prstGeom prst="rect">
             <a:avLst/>
@@ -676,7 +676,7 @@
               </a:spcAft>
             </a:pPr>
             <a:r>
-              <a:rPr lang="en-US" sz="1175" dirty="0">
+              <a:rPr lang="en-US" sz="1050" dirty="0">
                 <a:solidFill>
                   <a:srgbClr val="000000"/>
                 </a:solidFill>
@@ -694,8 +694,8 @@
         </p:nvSpPr>
         <p:spPr>
           <a:xfrm>
-            <a:off x="3557024" y="4060681"/>
-            <a:ext cx="1674150" cy="966571"/>
+            <a:off x="1694730" y="4025377"/>
+            <a:ext cx="1503295" cy="867928"/>
           </a:xfrm>
           <a:custGeom>
             <a:avLst/>
@@ -704,18 +704,18 @@
             <a:cxnLst/>
             <a:rect l="0" t="0" r="0" b="0"/>
             <a:pathLst>
-              <a:path w="1567289" h="904875" fill="none">
+              <a:path w="1503295" h="867928" fill="none">
                 <a:moveTo>
-                  <a:pt x="1567289" y="0"/>
+                  <a:pt x="1503295" y="0"/>
                 </a:moveTo>
                 <a:lnTo>
-                  <a:pt x="0" y="904875"/>
+                  <a:pt x="0" y="867928"/>
                 </a:lnTo>
               </a:path>
             </a:pathLst>
           </a:custGeom>
           <a:noFill/>
-          <a:ln w="10174">
+          <a:ln w="9136">
             <a:solidFill>
               <a:srgbClr val="7F7F7F"/>
             </a:solidFill>
@@ -730,8 +730,8 @@
         </p:nvSpPr>
         <p:spPr>
           <a:xfrm>
-            <a:off x="2671508" y="5017077"/>
-            <a:ext cx="854652" cy="203489"/>
+            <a:off x="899586" y="4884169"/>
+            <a:ext cx="767431" cy="182722"/>
           </a:xfrm>
           <a:prstGeom prst="rect">
             <a:avLst/>
@@ -754,7 +754,7 @@
               </a:spcAft>
             </a:pPr>
             <a:r>
-              <a:rPr lang="en-US" sz="1175" dirty="0">
+              <a:rPr lang="en-US" sz="1050" dirty="0">
                 <a:solidFill>
                   <a:srgbClr val="000000"/>
                 </a:solidFill>
@@ -772,8 +772,8 @@
         </p:nvSpPr>
         <p:spPr>
           <a:xfrm>
-            <a:off x="3557024" y="3094110"/>
-            <a:ext cx="1674150" cy="966571"/>
+            <a:off x="1694730" y="3157449"/>
+            <a:ext cx="1503295" cy="867928"/>
           </a:xfrm>
           <a:custGeom>
             <a:avLst/>
@@ -782,9 +782,9 @@
             <a:cxnLst/>
             <a:rect l="0" t="0" r="0" b="0"/>
             <a:pathLst>
-              <a:path w="1567289" h="904875" fill="none">
+              <a:path w="1503295" h="867928" fill="none">
                 <a:moveTo>
-                  <a:pt x="1567289" y="904875"/>
+                  <a:pt x="1503295" y="867928"/>
                 </a:moveTo>
                 <a:lnTo>
                   <a:pt x="0" y="0"/>
@@ -793,7 +793,7 @@
             </a:pathLst>
           </a:custGeom>
           <a:noFill/>
-          <a:ln w="10174">
+          <a:ln w="9136">
             <a:solidFill>
               <a:srgbClr val="7F7F7F"/>
             </a:solidFill>
@@ -808,8 +808,8 @@
         </p:nvSpPr>
         <p:spPr>
           <a:xfrm>
-            <a:off x="3117674" y="2900795"/>
-            <a:ext cx="376454" cy="203489"/>
+            <a:off x="1300218" y="2983863"/>
+            <a:ext cx="338035" cy="182722"/>
           </a:xfrm>
           <a:prstGeom prst="rect">
             <a:avLst/>
@@ -832,7 +832,7 @@
               </a:spcAft>
             </a:pPr>
             <a:r>
-              <a:rPr lang="en-US" sz="1175" dirty="0">
+              <a:rPr lang="en-US" sz="1050" dirty="0">
                 <a:solidFill>
                   <a:srgbClr val="000000"/>
                 </a:solidFill>
@@ -850,8 +850,8 @@
         </p:nvSpPr>
         <p:spPr>
           <a:xfrm>
-            <a:off x="3724438" y="2417510"/>
-            <a:ext cx="3013471" cy="2996370"/>
+            <a:off x="1845059" y="2549899"/>
+            <a:ext cx="2705932" cy="2690577"/>
           </a:xfrm>
           <a:custGeom>
             <a:avLst/>
@@ -860,24 +860,24 @@
             <a:cxnLst/>
             <a:rect l="0" t="0" r="0" b="0"/>
             <a:pathLst>
-              <a:path w="2821122" h="2805112">
+              <a:path w="2705932" h="2690577">
                 <a:moveTo>
-                  <a:pt x="1410561" y="0"/>
+                  <a:pt x="1352966" y="0"/>
                 </a:moveTo>
                 <a:lnTo>
-                  <a:pt x="2821122" y="723900"/>
-                </a:lnTo>
-                <a:lnTo>
-                  <a:pt x="2664393" y="2262187"/>
-                </a:lnTo>
-                <a:lnTo>
-                  <a:pt x="1410561" y="2805112"/>
-                </a:lnTo>
-                <a:lnTo>
-                  <a:pt x="235094" y="2216943"/>
-                </a:lnTo>
-                <a:lnTo>
-                  <a:pt x="0" y="723900"/>
+                  <a:pt x="2705932" y="694343"/>
+                </a:lnTo>
+                <a:lnTo>
+                  <a:pt x="2555602" y="2169820"/>
+                </a:lnTo>
+                <a:lnTo>
+                  <a:pt x="1352966" y="2690577"/>
+                </a:lnTo>
+                <a:lnTo>
+                  <a:pt x="225495" y="2126424"/>
+                </a:lnTo>
+                <a:lnTo>
+                  <a:pt x="0" y="694343"/>
                 </a:lnTo>
                 <a:close/>
               </a:path>
@@ -888,7 +888,7 @@
               <a:alpha val="30000"/>
             </a:srgbClr>
           </a:solidFill>
-          <a:ln w="30523">
+          <a:ln w="27408">
             <a:solidFill>
               <a:srgbClr val="4472C4"/>
             </a:solidFill>
@@ -903,8 +903,8 @@
         </p:nvSpPr>
         <p:spPr>
           <a:xfrm>
-            <a:off x="3724438" y="2707481"/>
-            <a:ext cx="2929763" cy="2899713"/>
+            <a:off x="1845059" y="2810278"/>
+            <a:ext cx="2630767" cy="2603783"/>
           </a:xfrm>
           <a:custGeom>
             <a:avLst/>
@@ -913,24 +913,24 @@
             <a:cxnLst/>
             <a:rect l="0" t="0" r="0" b="0"/>
             <a:pathLst>
-              <a:path w="2742757" h="2714625">
+              <a:path w="2630767" h="2603783">
                 <a:moveTo>
-                  <a:pt x="1410561" y="0"/>
+                  <a:pt x="1352966" y="0"/>
                 </a:moveTo>
                 <a:lnTo>
-                  <a:pt x="2586028" y="588169"/>
-                </a:lnTo>
-                <a:lnTo>
-                  <a:pt x="2742757" y="2035969"/>
-                </a:lnTo>
-                <a:lnTo>
-                  <a:pt x="1410561" y="2714625"/>
-                </a:lnTo>
-                <a:lnTo>
-                  <a:pt x="0" y="2081213"/>
-                </a:lnTo>
-                <a:lnTo>
-                  <a:pt x="78365" y="497681"/>
+                  <a:pt x="2480437" y="564153"/>
+                </a:lnTo>
+                <a:lnTo>
+                  <a:pt x="2630767" y="1952837"/>
+                </a:lnTo>
+                <a:lnTo>
+                  <a:pt x="1352966" y="2603783"/>
+                </a:lnTo>
+                <a:lnTo>
+                  <a:pt x="0" y="1996234"/>
+                </a:lnTo>
+                <a:lnTo>
+                  <a:pt x="75165" y="477360"/>
                 </a:lnTo>
                 <a:close/>
               </a:path>
@@ -941,7 +941,7 @@
               <a:alpha val="30000"/>
             </a:srgbClr>
           </a:solidFill>
-          <a:ln w="30523">
+          <a:ln w="27408">
             <a:solidFill>
               <a:srgbClr val="ED7D31"/>
             </a:solidFill>
@@ -956,8 +956,8 @@
         </p:nvSpPr>
         <p:spPr>
           <a:xfrm>
-            <a:off x="8385247" y="2168236"/>
-            <a:ext cx="142442" cy="142442"/>
+            <a:off x="6030211" y="2326065"/>
+            <a:ext cx="127905" cy="127905"/>
           </a:xfrm>
           <a:prstGeom prst="rect">
             <a:avLst/>
@@ -978,8 +978,8 @@
         </p:nvSpPr>
         <p:spPr>
           <a:xfrm>
-            <a:off x="8588736" y="2127539"/>
-            <a:ext cx="1322676" cy="223838"/>
+            <a:off x="6212932" y="2289521"/>
+            <a:ext cx="1187691" cy="200994"/>
           </a:xfrm>
           <a:prstGeom prst="rect">
             <a:avLst/>
@@ -990,7 +990,7 @@
           </a:ln>
         </p:spPr>
         <p:txBody>
-          <a:bodyPr wrap="none" lIns="20349" tIns="0" rIns="20349" bIns="0" anchor="ctr"/>
+          <a:bodyPr wrap="none" lIns="18272" tIns="0" rIns="18272" bIns="0" anchor="ctr"/>
           <a:lstStyle/>
           <a:p>
             <a:pPr algn="l">
@@ -1002,7 +1002,7 @@
               </a:spcAft>
             </a:pPr>
             <a:r>
-              <a:rPr lang="en-US" sz="1175" dirty="0">
+              <a:rPr lang="en-US" sz="1050" dirty="0">
                 <a:solidFill>
                   <a:srgbClr val="000000"/>
                 </a:solidFill>
@@ -1020,8 +1020,8 @@
         </p:nvSpPr>
         <p:spPr>
           <a:xfrm>
-            <a:off x="8385247" y="2432772"/>
-            <a:ext cx="142442" cy="142442"/>
+            <a:off x="6030211" y="2563603"/>
+            <a:ext cx="127905" cy="127905"/>
           </a:xfrm>
           <a:prstGeom prst="rect">
             <a:avLst/>
@@ -1042,8 +1042,8 @@
         </p:nvSpPr>
         <p:spPr>
           <a:xfrm>
-            <a:off x="8588736" y="2392074"/>
-            <a:ext cx="1322676" cy="223838"/>
+            <a:off x="6212932" y="2527059"/>
+            <a:ext cx="1187691" cy="200994"/>
           </a:xfrm>
           <a:prstGeom prst="rect">
             <a:avLst/>
@@ -1054,7 +1054,7 @@
           </a:ln>
         </p:spPr>
         <p:txBody>
-          <a:bodyPr wrap="none" lIns="20349" tIns="0" rIns="20349" bIns="0" anchor="ctr"/>
+          <a:bodyPr wrap="none" lIns="18272" tIns="0" rIns="18272" bIns="0" anchor="ctr"/>
           <a:lstStyle/>
           <a:p>
             <a:pPr algn="l">
@@ -1066,12 +1066,159 @@
               </a:spcAft>
             </a:pPr>
             <a:r>
-              <a:rPr lang="en-US" sz="1175" dirty="0">
+              <a:rPr lang="en-US" sz="1050" dirty="0">
                 <a:solidFill>
                   <a:srgbClr val="000000"/>
                 </a:solidFill>
               </a:rPr>
               <a:t>Bob</a:t>
+            </a:r>
+          </a:p>
+        </p:txBody>
+      </p:sp>
+      <p:sp>
+        <p:nvSpPr>
+          <p:cNvPr id="4" name="Mermaid source"/>
+          <p:cNvSpPr/>
+          <p:nvPr/>
+        </p:nvSpPr>
+        <p:spPr>
+          <a:xfrm>
+            <a:off x="7674864" y="1028700"/>
+            <a:ext cx="4059936" cy="5372100"/>
+          </a:xfrm>
+          <a:prstGeom prst="rect">
+            <a:avLst/>
+          </a:prstGeom>
+          <a:solidFill>
+            <a:srgbClr val="F3F4F6"/>
+          </a:solidFill>
+          <a:ln w="9525">
+            <a:solidFill>
+              <a:srgbClr val="D1D5DB"/>
+            </a:solidFill>
+          </a:ln>
+        </p:spPr>
+        <p:txBody>
+          <a:bodyPr wrap="square" lIns="91440" tIns="45720" rIns="91440" bIns="45720" anchor="t">
+            <a:noAutofit/>
+          </a:bodyPr>
+          <a:lstStyle/>
+          <a:p>
+            <a:pPr algn="l"/>
+            <a:r>
+              <a:rPr lang="en-US" sz="1400" dirty="0">
+                <a:solidFill>
+                  <a:srgbClr val="1F2937"/>
+                </a:solidFill>
+                <a:latin typeface="Consolas"/>
+                <a:cs typeface="Consolas"/>
+              </a:rPr>
+              <a:t>radar-beta</a:t>
+            </a:r>
+          </a:p>
+          <a:p>
+            <a:pPr algn="l"/>
+            <a:r>
+              <a:rPr lang="en-US" sz="1400" dirty="0">
+                <a:solidFill>
+                  <a:srgbClr val="1F2937"/>
+                </a:solidFill>
+                <a:latin typeface="Consolas"/>
+                <a:cs typeface="Consolas"/>
+              </a:rPr>
+              <a:t>  title Grades</a:t>
+            </a:r>
+          </a:p>
+          <a:p>
+            <a:pPr algn="l"/>
+            <a:r>
+              <a:rPr lang="en-US" sz="1400" dirty="0">
+                <a:solidFill>
+                  <a:srgbClr val="1F2937"/>
+                </a:solidFill>
+                <a:latin typeface="Consolas"/>
+                <a:cs typeface="Consolas"/>
+              </a:rPr>
+              <a:t>  axis m["Math"], s["Science"], e["English"]</a:t>
+            </a:r>
+          </a:p>
+          <a:p>
+            <a:pPr algn="l"/>
+            <a:r>
+              <a:rPr lang="en-US" sz="1400" dirty="0">
+                <a:solidFill>
+                  <a:srgbClr val="1F2937"/>
+                </a:solidFill>
+                <a:latin typeface="Consolas"/>
+                <a:cs typeface="Consolas"/>
+              </a:rPr>
+              <a:t>  axis h["History"], g["Geography"], a["Art"]</a:t>
+            </a:r>
+          </a:p>
+          <a:p>
+            <a:pPr algn="l"/>
+            <a:r>
+              <a:rPr lang="en-US" sz="1400" dirty="0">
+                <a:solidFill>
+                  <a:srgbClr val="1F2937"/>
+                </a:solidFill>
+                <a:latin typeface="Consolas"/>
+                <a:cs typeface="Consolas"/>
+              </a:rPr>
+              <a:t>  curve a["Alice"]{85, 90, 80, 70, 75, 90}</a:t>
+            </a:r>
+          </a:p>
+          <a:p>
+            <a:pPr algn="l"/>
+            <a:r>
+              <a:rPr lang="en-US" sz="1400" dirty="0">
+                <a:solidFill>
+                  <a:srgbClr val="1F2937"/>
+                </a:solidFill>
+                <a:latin typeface="Consolas"/>
+                <a:cs typeface="Consolas"/>
+              </a:rPr>
+              <a:t>  curve b["Bob"]{70, 75, 85, 80, 90, 85}</a:t>
+            </a:r>
+          </a:p>
+          <a:p>
+            <a:pPr algn="l"/>
+            <a:r>
+              <a:rPr lang="en-US" sz="1400" dirty="0">
+                <a:solidFill>
+                  <a:srgbClr val="1F2937"/>
+                </a:solidFill>
+                <a:latin typeface="Consolas"/>
+                <a:cs typeface="Consolas"/>
+              </a:rPr>
+              <a:t>  max 100</a:t>
+            </a:r>
+          </a:p>
+          <a:p>
+            <a:pPr algn="l"/>
+            <a:r>
+              <a:rPr lang="en-US" sz="1400" dirty="0">
+                <a:solidFill>
+                  <a:srgbClr val="1F2937"/>
+                </a:solidFill>
+                <a:latin typeface="Consolas"/>
+                <a:cs typeface="Consolas"/>
+              </a:rPr>
+              <a:t>  graticule polygon</a:t>
+            </a:r>
+          </a:p>
+          <a:p>
+            <a:pPr algn="l"/>
+            <a:r>
+              <a:rPr lang="en-US" sz="1400" dirty="0">
+                <a:solidFill>
+                  <a:srgbClr val="1F2937"/>
+                </a:solidFill>
+                <a:latin typeface="Consolas"/>
+                <a:cs typeface="Consolas"/>
+              </a:rPr>
+              <a:t>  ticks 4</a:t>
             </a:r>
           </a:p>
         </p:txBody>
